--- a/docs/tia-review-2.pptx
+++ b/docs/tia-review-2.pptx
@@ -1965,7 +1965,7 @@
                 <a:ea typeface="Calibri" pitchFamily="34" charset="-122"/>
                 <a:cs typeface="Calibri" pitchFamily="34" charset="-120"/>
               </a:rPr>
-              <a:t>Zero missed defects across 74 injected into two real codebases, at 50.7% and 66.3% less test time.</a:t>
+              <a:t>Zero missed defects across 211 injected into two real codebases, at up to 65.2% less test time.</a:t>
             </a:r>
             <a:endParaRPr lang="en-US" sz="1400" dirty="0"/>
           </a:p>
@@ -6224,7 +6224,7 @@
                 <a:ea typeface="Calibri" pitchFamily="34" charset="-122"/>
                 <a:cs typeface="Calibri" pitchFamily="34" charset="-120"/>
               </a:rPr>
-              <a:t>What we claim instead is bounded, measured safety: 0 misses in 74 non-equivalent injected defects, on two real codebases, reproducible from the pinned corpus with one command.</a:t>
+              <a:t>What we claim instead is bounded, measured safety: 0 misses in 211 non-equivalent injected defects, on two real codebases, reproducible from the pinned corpus with one command.</a:t>
             </a:r>
             <a:endParaRPr lang="en-US" sz="1300" dirty="0"/>
           </a:p>
@@ -6779,7 +6779,7 @@
                 <a:ea typeface="Calibri" pitchFamily="34" charset="-122"/>
                 <a:cs typeface="Calibri" pitchFamily="34" charset="-120"/>
               </a:rPr>
-              <a:t>124 tests, mypy --strict, 24 commits</a:t>
+              <a:t>125 tests, mypy --strict, 27 commits</a:t>
             </a:r>
             <a:endParaRPr lang="en-US" sz="1100" dirty="0"/>
           </a:p>
@@ -7207,7 +7207,7 @@
                 <a:ea typeface="Cambria" pitchFamily="34" charset="-122"/>
                 <a:cs typeface="Cambria" pitchFamily="34" charset="-120"/>
               </a:rPr>
-              <a:t>0 misses in 74 injected defects. 66.3% less test time on a 4,371-test suite. Three bugs found by our own evaluation, all published.</a:t>
+              <a:t>0 misses in 211 injected defects. 65.2% less test time on a 4,371-test suite. Four bugs found by our own evaluation — including one the import graph itself introduced.</a:t>
             </a:r>
             <a:endParaRPr lang="en-US" sz="1500" dirty="0"/>
           </a:p>
@@ -7376,7 +7376,7 @@
                 <a:ea typeface="Cambria" pitchFamily="34" charset="-122"/>
                 <a:cs typeface="Cambria" pitchFamily="34" charset="-120"/>
               </a:rPr>
-              <a:t>0 / 74</a:t>
+              <a:t>0 / 211</a:t>
             </a:r>
             <a:endParaRPr lang="en-US" sz="3400" dirty="0"/>
           </a:p>
@@ -7454,7 +7454,7 @@
                 <a:ea typeface="Calibri" pitchFamily="34" charset="-122"/>
                 <a:cs typeface="Calibri" pitchFamily="34" charset="-120"/>
               </a:rPr>
-              <a:t>across two real codebases</a:t>
+              <a:t>attrs at 200 mutants, scrapy at 30</a:t>
             </a:r>
             <a:endParaRPr lang="en-US" sz="1000" dirty="0"/>
           </a:p>
@@ -7520,7 +7520,7 @@
                 <a:ea typeface="Cambria" pitchFamily="34" charset="-122"/>
                 <a:cs typeface="Cambria" pitchFamily="34" charset="-120"/>
               </a:rPr>
-              <a:t>66.3%</a:t>
+              <a:t>65.2%</a:t>
             </a:r>
             <a:endParaRPr lang="en-US" sz="3400" dirty="0"/>
           </a:p>
@@ -7598,7 +7598,7 @@
                 <a:ea typeface="Calibri" pitchFamily="34" charset="-122"/>
                 <a:cs typeface="Calibri" pitchFamily="34" charset="-120"/>
               </a:rPr>
-              <a:t>50.7% on attrs</a:t>
+              <a:t>58.4% on attrs</a:t>
             </a:r>
             <a:endParaRPr lang="en-US" sz="1000" dirty="0"/>
           </a:p>
@@ -7742,7 +7742,7 @@
                 <a:ea typeface="Calibri" pitchFamily="34" charset="-122"/>
                 <a:cs typeface="Calibri" pitchFamily="34" charset="-120"/>
               </a:rPr>
-              <a:t>51.1% on attrs — the honest cost</a:t>
+              <a:t>50.5% on attrs — the honest cost</a:t>
             </a:r>
             <a:endParaRPr lang="en-US" sz="1000" dirty="0"/>
           </a:p>
@@ -8447,7 +8447,7 @@
                           <a:ea typeface="Calibri" pitchFamily="34" charset="-122"/>
                           <a:cs typeface="Calibri" pitchFamily="34" charset="-120"/>
                         </a:rPr>
-                        <a:t>47</a:t>
+                        <a:t>184</a:t>
                       </a:r>
                       <a:endParaRPr lang="en-US" sz="1100" dirty="0">
                         <a:latin typeface="Calibri" charset="0"/>
@@ -8841,7 +8841,7 @@
                           <a:ea typeface="Calibri" pitchFamily="34" charset="-122"/>
                           <a:cs typeface="Calibri" pitchFamily="34" charset="-120"/>
                         </a:rPr>
-                        <a:t>51.1%</a:t>
+                        <a:t>50.5%</a:t>
                       </a:r>
                       <a:endParaRPr lang="en-US" sz="1100" dirty="0">
                         <a:latin typeface="Calibri" charset="0"/>
@@ -9038,7 +9038,7 @@
                           <a:ea typeface="Calibri" pitchFamily="34" charset="-122"/>
                           <a:cs typeface="Calibri" pitchFamily="34" charset="-120"/>
                         </a:rPr>
-                        <a:t>50.7%</a:t>
+                        <a:t>58.4%</a:t>
                       </a:r>
                       <a:endParaRPr lang="en-US" sz="1100" dirty="0">
                         <a:latin typeface="Calibri" charset="0"/>
@@ -9103,7 +9103,204 @@
                           <a:ea typeface="Calibri" pitchFamily="34" charset="-122"/>
                           <a:cs typeface="Calibri" pitchFamily="34" charset="-120"/>
                         </a:rPr>
-                        <a:t>66.3%</a:t>
+                        <a:t>65.2%</a:t>
+                      </a:r>
+                      <a:endParaRPr lang="en-US" sz="1100" dirty="0">
+                        <a:latin typeface="Calibri" charset="0"/>
+                        <a:ea typeface="Calibri" charset="0"/>
+                        <a:cs typeface="Calibri" charset="0"/>
+                      </a:endParaRPr>
+                    </a:p>
+                  </a:txBody>
+                  <a:tcPr marL="54864" marR="54864" marT="54864" marB="54864" anchor="ctr">
+                    <a:lnL w="6350" cap="flat" cmpd="sng" algn="ctr">
+                      <a:solidFill>
+                        <a:srgbClr val="D8DEE4"/>
+                      </a:solidFill>
+                      <a:prstDash val="solid"/>
+                      <a:round/>
+                      <a:headEnd type="none" w="med" len="med"/>
+                      <a:tailEnd type="none" w="med" len="med"/>
+                    </a:lnL>
+                    <a:lnR w="6350" cap="flat" cmpd="sng" algn="ctr">
+                      <a:solidFill>
+                        <a:srgbClr val="D8DEE4"/>
+                      </a:solidFill>
+                      <a:prstDash val="solid"/>
+                      <a:round/>
+                      <a:headEnd type="none" w="med" len="med"/>
+                      <a:tailEnd type="none" w="med" len="med"/>
+                    </a:lnR>
+                    <a:lnT w="6350" cap="flat" cmpd="sng" algn="ctr">
+                      <a:solidFill>
+                        <a:srgbClr val="D8DEE4"/>
+                      </a:solidFill>
+                      <a:prstDash val="solid"/>
+                      <a:round/>
+                      <a:headEnd type="none" w="med" len="med"/>
+                      <a:tailEnd type="none" w="med" len="med"/>
+                    </a:lnT>
+                    <a:lnB w="6350" cap="flat" cmpd="sng" algn="ctr">
+                      <a:solidFill>
+                        <a:srgbClr val="D8DEE4"/>
+                      </a:solidFill>
+                      <a:prstDash val="solid"/>
+                      <a:round/>
+                      <a:headEnd type="none" w="med" len="med"/>
+                      <a:tailEnd type="none" w="med" len="med"/>
+                    </a:lnB>
+                  </a:tcPr>
+                </a:tc>
+              </a:tr>
+              <a:tr h="329184">
+                <a:tc>
+                  <a:txBody>
+                    <a:bodyPr/>
+                    <a:lstStyle/>
+                    <a:p>
+                      <a:pPr indent="0" marL="0">
+                        <a:buNone/>
+                      </a:pPr>
+                      <a:r>
+                        <a:rPr lang="en-US" sz="1100" dirty="0">
+                          <a:solidFill>
+                            <a:srgbClr val="17232F"/>
+                          </a:solidFill>
+                          <a:latin typeface="Calibri" pitchFamily="34" charset="0"/>
+                          <a:ea typeface="Calibri" pitchFamily="34" charset="-122"/>
+                          <a:cs typeface="Calibri" pitchFamily="34" charset="-120"/>
+                        </a:rPr>
+                        <a:t>Selection precision, median</a:t>
+                      </a:r>
+                      <a:endParaRPr lang="en-US" sz="1100" dirty="0">
+                        <a:latin typeface="Calibri" charset="0"/>
+                        <a:ea typeface="Calibri" charset="0"/>
+                        <a:cs typeface="Calibri" charset="0"/>
+                      </a:endParaRPr>
+                    </a:p>
+                  </a:txBody>
+                  <a:tcPr marL="54864" marR="54864" marT="54864" marB="54864" anchor="ctr">
+                    <a:lnL w="6350" cap="flat" cmpd="sng" algn="ctr">
+                      <a:solidFill>
+                        <a:srgbClr val="D8DEE4"/>
+                      </a:solidFill>
+                      <a:prstDash val="solid"/>
+                      <a:round/>
+                      <a:headEnd type="none" w="med" len="med"/>
+                      <a:tailEnd type="none" w="med" len="med"/>
+                    </a:lnL>
+                    <a:lnR w="6350" cap="flat" cmpd="sng" algn="ctr">
+                      <a:solidFill>
+                        <a:srgbClr val="D8DEE4"/>
+                      </a:solidFill>
+                      <a:prstDash val="solid"/>
+                      <a:round/>
+                      <a:headEnd type="none" w="med" len="med"/>
+                      <a:tailEnd type="none" w="med" len="med"/>
+                    </a:lnR>
+                    <a:lnT w="6350" cap="flat" cmpd="sng" algn="ctr">
+                      <a:solidFill>
+                        <a:srgbClr val="D8DEE4"/>
+                      </a:solidFill>
+                      <a:prstDash val="solid"/>
+                      <a:round/>
+                      <a:headEnd type="none" w="med" len="med"/>
+                      <a:tailEnd type="none" w="med" len="med"/>
+                    </a:lnT>
+                    <a:lnB w="6350" cap="flat" cmpd="sng" algn="ctr">
+                      <a:solidFill>
+                        <a:srgbClr val="D8DEE4"/>
+                      </a:solidFill>
+                      <a:prstDash val="solid"/>
+                      <a:round/>
+                      <a:headEnd type="none" w="med" len="med"/>
+                      <a:tailEnd type="none" w="med" len="med"/>
+                    </a:lnB>
+                  </a:tcPr>
+                </a:tc>
+                <a:tc>
+                  <a:txBody>
+                    <a:bodyPr/>
+                    <a:lstStyle/>
+                    <a:p>
+                      <a:pPr indent="0" marL="0">
+                        <a:buNone/>
+                      </a:pPr>
+                      <a:r>
+                        <a:rPr lang="en-US" sz="1100" dirty="0">
+                          <a:solidFill>
+                            <a:srgbClr val="17232F"/>
+                          </a:solidFill>
+                          <a:latin typeface="Calibri" pitchFamily="34" charset="0"/>
+                          <a:ea typeface="Calibri" pitchFamily="34" charset="-122"/>
+                          <a:cs typeface="Calibri" pitchFamily="34" charset="-120"/>
+                        </a:rPr>
+                        <a:t>55.2%</a:t>
+                      </a:r>
+                      <a:endParaRPr lang="en-US" sz="1100" dirty="0">
+                        <a:latin typeface="Calibri" charset="0"/>
+                        <a:ea typeface="Calibri" charset="0"/>
+                        <a:cs typeface="Calibri" charset="0"/>
+                      </a:endParaRPr>
+                    </a:p>
+                  </a:txBody>
+                  <a:tcPr marL="54864" marR="54864" marT="54864" marB="54864" anchor="ctr">
+                    <a:lnL w="6350" cap="flat" cmpd="sng" algn="ctr">
+                      <a:solidFill>
+                        <a:srgbClr val="D8DEE4"/>
+                      </a:solidFill>
+                      <a:prstDash val="solid"/>
+                      <a:round/>
+                      <a:headEnd type="none" w="med" len="med"/>
+                      <a:tailEnd type="none" w="med" len="med"/>
+                    </a:lnL>
+                    <a:lnR w="6350" cap="flat" cmpd="sng" algn="ctr">
+                      <a:solidFill>
+                        <a:srgbClr val="D8DEE4"/>
+                      </a:solidFill>
+                      <a:prstDash val="solid"/>
+                      <a:round/>
+                      <a:headEnd type="none" w="med" len="med"/>
+                      <a:tailEnd type="none" w="med" len="med"/>
+                    </a:lnR>
+                    <a:lnT w="6350" cap="flat" cmpd="sng" algn="ctr">
+                      <a:solidFill>
+                        <a:srgbClr val="D8DEE4"/>
+                      </a:solidFill>
+                      <a:prstDash val="solid"/>
+                      <a:round/>
+                      <a:headEnd type="none" w="med" len="med"/>
+                      <a:tailEnd type="none" w="med" len="med"/>
+                    </a:lnT>
+                    <a:lnB w="6350" cap="flat" cmpd="sng" algn="ctr">
+                      <a:solidFill>
+                        <a:srgbClr val="D8DEE4"/>
+                      </a:solidFill>
+                      <a:prstDash val="solid"/>
+                      <a:round/>
+                      <a:headEnd type="none" w="med" len="med"/>
+                      <a:tailEnd type="none" w="med" len="med"/>
+                    </a:lnB>
+                  </a:tcPr>
+                </a:tc>
+                <a:tc>
+                  <a:txBody>
+                    <a:bodyPr/>
+                    <a:lstStyle/>
+                    <a:p>
+                      <a:pPr indent="0" marL="0">
+                        <a:buNone/>
+                      </a:pPr>
+                      <a:r>
+                        <a:rPr lang="en-US" sz="1100" dirty="0">
+                          <a:solidFill>
+                            <a:srgbClr val="17232F"/>
+                          </a:solidFill>
+                          <a:latin typeface="Calibri" pitchFamily="34" charset="0"/>
+                          <a:ea typeface="Calibri" pitchFamily="34" charset="-122"/>
+                          <a:cs typeface="Calibri" pitchFamily="34" charset="-120"/>
+                        </a:rPr>
+                        <a:t>9.8%</a:t>
                       </a:r>
                       <a:endParaRPr lang="en-US" sz="1100" dirty="0">
                         <a:latin typeface="Calibri" charset="0"/>
@@ -12769,7 +12966,7 @@
                           <a:ea typeface="Calibri" pitchFamily="34" charset="-122"/>
                           <a:cs typeface="Calibri" pitchFamily="34" charset="-120"/>
                         </a:rPr>
-                        <a:t>0 / 47</a:t>
+                        <a:t>0 / 184</a:t>
                       </a:r>
                       <a:endParaRPr lang="en-US" sz="1100" dirty="0">
                         <a:latin typeface="Calibri" charset="0"/>
@@ -12834,7 +13031,7 @@
                           <a:ea typeface="Calibri" pitchFamily="34" charset="-122"/>
                           <a:cs typeface="Calibri" pitchFamily="34" charset="-120"/>
                         </a:rPr>
-                        <a:t>0 / 47</a:t>
+                        <a:t>0 / 184</a:t>
                       </a:r>
                       <a:endParaRPr lang="en-US" sz="1100" dirty="0">
                         <a:latin typeface="Calibri" charset="0"/>
@@ -13096,7 +13293,7 @@
                           <a:ea typeface="Calibri" pitchFamily="34" charset="-122"/>
                           <a:cs typeface="Calibri" pitchFamily="34" charset="-120"/>
                         </a:rPr>
-                        <a:t>59.6%</a:t>
+                        <a:t>52.7%</a:t>
                       </a:r>
                       <a:endParaRPr lang="en-US" sz="1100" dirty="0">
                         <a:latin typeface="Calibri" charset="0"/>
@@ -13155,13 +13352,13 @@
                       <a:r>
                         <a:rPr lang="en-US" sz="1100" dirty="0">
                           <a:solidFill>
-                            <a:srgbClr val="2E7D62"/>
+                            <a:srgbClr val="17232F"/>
                           </a:solidFill>
                           <a:latin typeface="Calibri" pitchFamily="34" charset="0"/>
                           <a:ea typeface="Calibri" pitchFamily="34" charset="-122"/>
                           <a:cs typeface="Calibri" pitchFamily="34" charset="-120"/>
                         </a:rPr>
-                        <a:t>51.1%</a:t>
+                        <a:t>50.5%</a:t>
                       </a:r>
                       <a:endParaRPr lang="en-US" sz="1100" dirty="0">
                         <a:latin typeface="Calibri" charset="0"/>
@@ -13292,333 +13489,6 @@
                           <a:cs typeface="Calibri" pitchFamily="34" charset="-120"/>
                         </a:rPr>
                         <a:t>29.6%</a:t>
-                      </a:r>
-                      <a:endParaRPr lang="en-US" sz="1100" dirty="0">
-                        <a:latin typeface="Calibri" charset="0"/>
-                        <a:ea typeface="Calibri" charset="0"/>
-                        <a:cs typeface="Calibri" charset="0"/>
-                      </a:endParaRPr>
-                    </a:p>
-                  </a:txBody>
-                  <a:tcPr marL="54864" marR="54864" marT="54864" marB="54864" anchor="ctr">
-                    <a:lnL w="6350" cap="flat" cmpd="sng" algn="ctr">
-                      <a:solidFill>
-                        <a:srgbClr val="D8DEE4"/>
-                      </a:solidFill>
-                      <a:prstDash val="solid"/>
-                      <a:round/>
-                      <a:headEnd type="none" w="med" len="med"/>
-                      <a:tailEnd type="none" w="med" len="med"/>
-                    </a:lnL>
-                    <a:lnR w="6350" cap="flat" cmpd="sng" algn="ctr">
-                      <a:solidFill>
-                        <a:srgbClr val="D8DEE4"/>
-                      </a:solidFill>
-                      <a:prstDash val="solid"/>
-                      <a:round/>
-                      <a:headEnd type="none" w="med" len="med"/>
-                      <a:tailEnd type="none" w="med" len="med"/>
-                    </a:lnR>
-                    <a:lnT w="6350" cap="flat" cmpd="sng" algn="ctr">
-                      <a:solidFill>
-                        <a:srgbClr val="D8DEE4"/>
-                      </a:solidFill>
-                      <a:prstDash val="solid"/>
-                      <a:round/>
-                      <a:headEnd type="none" w="med" len="med"/>
-                      <a:tailEnd type="none" w="med" len="med"/>
-                    </a:lnT>
-                    <a:lnB w="6350" cap="flat" cmpd="sng" algn="ctr">
-                      <a:solidFill>
-                        <a:srgbClr val="D8DEE4"/>
-                      </a:solidFill>
-                      <a:prstDash val="solid"/>
-                      <a:round/>
-                      <a:headEnd type="none" w="med" len="med"/>
-                      <a:tailEnd type="none" w="med" len="med"/>
-                    </a:lnB>
-                  </a:tcPr>
-                </a:tc>
-              </a:tr>
-              <a:tr h="384048">
-                <a:tc>
-                  <a:txBody>
-                    <a:bodyPr/>
-                    <a:lstStyle/>
-                    <a:p>
-                      <a:pPr indent="0" marL="0">
-                        <a:buNone/>
-                      </a:pPr>
-                      <a:r>
-                        <a:rPr lang="en-US" sz="1100" dirty="0">
-                          <a:solidFill>
-                            <a:srgbClr val="17232F"/>
-                          </a:solidFill>
-                          <a:latin typeface="Calibri" pitchFamily="34" charset="0"/>
-                          <a:ea typeface="Calibri" pitchFamily="34" charset="-122"/>
-                          <a:cs typeface="Calibri" pitchFamily="34" charset="-120"/>
-                        </a:rPr>
-                        <a:t>Mutants selecting</a:t>
-                      </a:r>
-                      <a:endParaRPr lang="en-US" sz="1100" dirty="0">
-                        <a:latin typeface="Calibri" charset="0"/>
-                        <a:ea typeface="Calibri" charset="0"/>
-                        <a:cs typeface="Calibri" charset="0"/>
-                      </a:endParaRPr>
-                    </a:p>
-                  </a:txBody>
-                  <a:tcPr marL="54864" marR="54864" marT="54864" marB="54864" anchor="ctr">
-                    <a:lnL w="6350" cap="flat" cmpd="sng" algn="ctr">
-                      <a:solidFill>
-                        <a:srgbClr val="D8DEE4"/>
-                      </a:solidFill>
-                      <a:prstDash val="solid"/>
-                      <a:round/>
-                      <a:headEnd type="none" w="med" len="med"/>
-                      <a:tailEnd type="none" w="med" len="med"/>
-                    </a:lnL>
-                    <a:lnR w="6350" cap="flat" cmpd="sng" algn="ctr">
-                      <a:solidFill>
-                        <a:srgbClr val="D8DEE4"/>
-                      </a:solidFill>
-                      <a:prstDash val="solid"/>
-                      <a:round/>
-                      <a:headEnd type="none" w="med" len="med"/>
-                      <a:tailEnd type="none" w="med" len="med"/>
-                    </a:lnR>
-                    <a:lnT w="6350" cap="flat" cmpd="sng" algn="ctr">
-                      <a:solidFill>
-                        <a:srgbClr val="D8DEE4"/>
-                      </a:solidFill>
-                      <a:prstDash val="solid"/>
-                      <a:round/>
-                      <a:headEnd type="none" w="med" len="med"/>
-                      <a:tailEnd type="none" w="med" len="med"/>
-                    </a:lnT>
-                    <a:lnB w="6350" cap="flat" cmpd="sng" algn="ctr">
-                      <a:solidFill>
-                        <a:srgbClr val="D8DEE4"/>
-                      </a:solidFill>
-                      <a:prstDash val="solid"/>
-                      <a:round/>
-                      <a:headEnd type="none" w="med" len="med"/>
-                      <a:tailEnd type="none" w="med" len="med"/>
-                    </a:lnB>
-                  </a:tcPr>
-                </a:tc>
-                <a:tc>
-                  <a:txBody>
-                    <a:bodyPr/>
-                    <a:lstStyle/>
-                    <a:p>
-                      <a:pPr indent="0" marL="0">
-                        <a:buNone/>
-                      </a:pPr>
-                      <a:r>
-                        <a:rPr lang="en-US" sz="1100" dirty="0">
-                          <a:solidFill>
-                            <a:srgbClr val="17232F"/>
-                          </a:solidFill>
-                          <a:latin typeface="Calibri" pitchFamily="34" charset="0"/>
-                          <a:ea typeface="Calibri" pitchFamily="34" charset="-122"/>
-                          <a:cs typeface="Calibri" pitchFamily="34" charset="-120"/>
-                        </a:rPr>
-                        <a:t>19</a:t>
-                      </a:r>
-                      <a:endParaRPr lang="en-US" sz="1100" dirty="0">
-                        <a:latin typeface="Calibri" charset="0"/>
-                        <a:ea typeface="Calibri" charset="0"/>
-                        <a:cs typeface="Calibri" charset="0"/>
-                      </a:endParaRPr>
-                    </a:p>
-                  </a:txBody>
-                  <a:tcPr marL="54864" marR="54864" marT="54864" marB="54864" anchor="ctr">
-                    <a:lnL w="6350" cap="flat" cmpd="sng" algn="ctr">
-                      <a:solidFill>
-                        <a:srgbClr val="D8DEE4"/>
-                      </a:solidFill>
-                      <a:prstDash val="solid"/>
-                      <a:round/>
-                      <a:headEnd type="none" w="med" len="med"/>
-                      <a:tailEnd type="none" w="med" len="med"/>
-                    </a:lnL>
-                    <a:lnR w="6350" cap="flat" cmpd="sng" algn="ctr">
-                      <a:solidFill>
-                        <a:srgbClr val="D8DEE4"/>
-                      </a:solidFill>
-                      <a:prstDash val="solid"/>
-                      <a:round/>
-                      <a:headEnd type="none" w="med" len="med"/>
-                      <a:tailEnd type="none" w="med" len="med"/>
-                    </a:lnR>
-                    <a:lnT w="6350" cap="flat" cmpd="sng" algn="ctr">
-                      <a:solidFill>
-                        <a:srgbClr val="D8DEE4"/>
-                      </a:solidFill>
-                      <a:prstDash val="solid"/>
-                      <a:round/>
-                      <a:headEnd type="none" w="med" len="med"/>
-                      <a:tailEnd type="none" w="med" len="med"/>
-                    </a:lnT>
-                    <a:lnB w="6350" cap="flat" cmpd="sng" algn="ctr">
-                      <a:solidFill>
-                        <a:srgbClr val="D8DEE4"/>
-                      </a:solidFill>
-                      <a:prstDash val="solid"/>
-                      <a:round/>
-                      <a:headEnd type="none" w="med" len="med"/>
-                      <a:tailEnd type="none" w="med" len="med"/>
-                    </a:lnB>
-                  </a:tcPr>
-                </a:tc>
-                <a:tc>
-                  <a:txBody>
-                    <a:bodyPr/>
-                    <a:lstStyle/>
-                    <a:p>
-                      <a:pPr indent="0" marL="0">
-                        <a:buNone/>
-                      </a:pPr>
-                      <a:r>
-                        <a:rPr lang="en-US" sz="1100" dirty="0">
-                          <a:solidFill>
-                            <a:srgbClr val="17232F"/>
-                          </a:solidFill>
-                          <a:latin typeface="Calibri" pitchFamily="34" charset="0"/>
-                          <a:ea typeface="Calibri" pitchFamily="34" charset="-122"/>
-                          <a:cs typeface="Calibri" pitchFamily="34" charset="-120"/>
-                        </a:rPr>
-                        <a:t>23</a:t>
-                      </a:r>
-                      <a:endParaRPr lang="en-US" sz="1100" dirty="0">
-                        <a:latin typeface="Calibri" charset="0"/>
-                        <a:ea typeface="Calibri" charset="0"/>
-                        <a:cs typeface="Calibri" charset="0"/>
-                      </a:endParaRPr>
-                    </a:p>
-                  </a:txBody>
-                  <a:tcPr marL="54864" marR="54864" marT="54864" marB="54864" anchor="ctr">
-                    <a:lnL w="6350" cap="flat" cmpd="sng" algn="ctr">
-                      <a:solidFill>
-                        <a:srgbClr val="D8DEE4"/>
-                      </a:solidFill>
-                      <a:prstDash val="solid"/>
-                      <a:round/>
-                      <a:headEnd type="none" w="med" len="med"/>
-                      <a:tailEnd type="none" w="med" len="med"/>
-                    </a:lnL>
-                    <a:lnR w="6350" cap="flat" cmpd="sng" algn="ctr">
-                      <a:solidFill>
-                        <a:srgbClr val="D8DEE4"/>
-                      </a:solidFill>
-                      <a:prstDash val="solid"/>
-                      <a:round/>
-                      <a:headEnd type="none" w="med" len="med"/>
-                      <a:tailEnd type="none" w="med" len="med"/>
-                    </a:lnR>
-                    <a:lnT w="6350" cap="flat" cmpd="sng" algn="ctr">
-                      <a:solidFill>
-                        <a:srgbClr val="D8DEE4"/>
-                      </a:solidFill>
-                      <a:prstDash val="solid"/>
-                      <a:round/>
-                      <a:headEnd type="none" w="med" len="med"/>
-                      <a:tailEnd type="none" w="med" len="med"/>
-                    </a:lnT>
-                    <a:lnB w="6350" cap="flat" cmpd="sng" algn="ctr">
-                      <a:solidFill>
-                        <a:srgbClr val="D8DEE4"/>
-                      </a:solidFill>
-                      <a:prstDash val="solid"/>
-                      <a:round/>
-                      <a:headEnd type="none" w="med" len="med"/>
-                      <a:tailEnd type="none" w="med" len="med"/>
-                    </a:lnB>
-                  </a:tcPr>
-                </a:tc>
-                <a:tc>
-                  <a:txBody>
-                    <a:bodyPr/>
-                    <a:lstStyle/>
-                    <a:p>
-                      <a:pPr indent="0" marL="0">
-                        <a:buNone/>
-                      </a:pPr>
-                      <a:r>
-                        <a:rPr lang="en-US" sz="1100" dirty="0">
-                          <a:solidFill>
-                            <a:srgbClr val="17232F"/>
-                          </a:solidFill>
-                          <a:latin typeface="Calibri" pitchFamily="34" charset="0"/>
-                          <a:ea typeface="Calibri" pitchFamily="34" charset="-122"/>
-                          <a:cs typeface="Calibri" pitchFamily="34" charset="-120"/>
-                        </a:rPr>
-                        <a:t>11</a:t>
-                      </a:r>
-                      <a:endParaRPr lang="en-US" sz="1100" dirty="0">
-                        <a:latin typeface="Calibri" charset="0"/>
-                        <a:ea typeface="Calibri" charset="0"/>
-                        <a:cs typeface="Calibri" charset="0"/>
-                      </a:endParaRPr>
-                    </a:p>
-                  </a:txBody>
-                  <a:tcPr marL="54864" marR="54864" marT="54864" marB="54864" anchor="ctr">
-                    <a:lnL w="6350" cap="flat" cmpd="sng" algn="ctr">
-                      <a:solidFill>
-                        <a:srgbClr val="D8DEE4"/>
-                      </a:solidFill>
-                      <a:prstDash val="solid"/>
-                      <a:round/>
-                      <a:headEnd type="none" w="med" len="med"/>
-                      <a:tailEnd type="none" w="med" len="med"/>
-                    </a:lnL>
-                    <a:lnR w="6350" cap="flat" cmpd="sng" algn="ctr">
-                      <a:solidFill>
-                        <a:srgbClr val="D8DEE4"/>
-                      </a:solidFill>
-                      <a:prstDash val="solid"/>
-                      <a:round/>
-                      <a:headEnd type="none" w="med" len="med"/>
-                      <a:tailEnd type="none" w="med" len="med"/>
-                    </a:lnR>
-                    <a:lnT w="6350" cap="flat" cmpd="sng" algn="ctr">
-                      <a:solidFill>
-                        <a:srgbClr val="D8DEE4"/>
-                      </a:solidFill>
-                      <a:prstDash val="solid"/>
-                      <a:round/>
-                      <a:headEnd type="none" w="med" len="med"/>
-                      <a:tailEnd type="none" w="med" len="med"/>
-                    </a:lnT>
-                    <a:lnB w="6350" cap="flat" cmpd="sng" algn="ctr">
-                      <a:solidFill>
-                        <a:srgbClr val="D8DEE4"/>
-                      </a:solidFill>
-                      <a:prstDash val="solid"/>
-                      <a:round/>
-                      <a:headEnd type="none" w="med" len="med"/>
-                      <a:tailEnd type="none" w="med" len="med"/>
-                    </a:lnB>
-                  </a:tcPr>
-                </a:tc>
-                <a:tc>
-                  <a:txBody>
-                    <a:bodyPr/>
-                    <a:lstStyle/>
-                    <a:p>
-                      <a:pPr indent="0" marL="0">
-                        <a:buNone/>
-                      </a:pPr>
-                      <a:r>
-                        <a:rPr lang="en-US" sz="1100" dirty="0">
-                          <a:solidFill>
-                            <a:srgbClr val="17232F"/>
-                          </a:solidFill>
-                          <a:latin typeface="Calibri" pitchFamily="34" charset="0"/>
-                          <a:ea typeface="Calibri" pitchFamily="34" charset="-122"/>
-                          <a:cs typeface="Calibri" pitchFamily="34" charset="-120"/>
-                        </a:rPr>
-                        <a:t>19</a:t>
                       </a:r>
                       <a:endParaRPr lang="en-US" sz="1100" dirty="0">
                         <a:latin typeface="Calibri" charset="0"/>
@@ -13750,72 +13620,7 @@
                           <a:ea typeface="Calibri" pitchFamily="34" charset="-122"/>
                           <a:cs typeface="Calibri" pitchFamily="34" charset="-120"/>
                         </a:rPr>
-                        <a:t>46.2%</a:t>
-                      </a:r>
-                      <a:endParaRPr lang="en-US" sz="1100" dirty="0">
-                        <a:latin typeface="Calibri" charset="0"/>
-                        <a:ea typeface="Calibri" charset="0"/>
-                        <a:cs typeface="Calibri" charset="0"/>
-                      </a:endParaRPr>
-                    </a:p>
-                  </a:txBody>
-                  <a:tcPr marL="54864" marR="54864" marT="54864" marB="54864" anchor="ctr">
-                    <a:lnL w="6350" cap="flat" cmpd="sng" algn="ctr">
-                      <a:solidFill>
-                        <a:srgbClr val="D8DEE4"/>
-                      </a:solidFill>
-                      <a:prstDash val="solid"/>
-                      <a:round/>
-                      <a:headEnd type="none" w="med" len="med"/>
-                      <a:tailEnd type="none" w="med" len="med"/>
-                    </a:lnL>
-                    <a:lnR w="6350" cap="flat" cmpd="sng" algn="ctr">
-                      <a:solidFill>
-                        <a:srgbClr val="D8DEE4"/>
-                      </a:solidFill>
-                      <a:prstDash val="solid"/>
-                      <a:round/>
-                      <a:headEnd type="none" w="med" len="med"/>
-                      <a:tailEnd type="none" w="med" len="med"/>
-                    </a:lnR>
-                    <a:lnT w="6350" cap="flat" cmpd="sng" algn="ctr">
-                      <a:solidFill>
-                        <a:srgbClr val="D8DEE4"/>
-                      </a:solidFill>
-                      <a:prstDash val="solid"/>
-                      <a:round/>
-                      <a:headEnd type="none" w="med" len="med"/>
-                      <a:tailEnd type="none" w="med" len="med"/>
-                    </a:lnT>
-                    <a:lnB w="6350" cap="flat" cmpd="sng" algn="ctr">
-                      <a:solidFill>
-                        <a:srgbClr val="D8DEE4"/>
-                      </a:solidFill>
-                      <a:prstDash val="solid"/>
-                      <a:round/>
-                      <a:headEnd type="none" w="med" len="med"/>
-                      <a:tailEnd type="none" w="med" len="med"/>
-                    </a:lnB>
-                  </a:tcPr>
-                </a:tc>
-                <a:tc>
-                  <a:txBody>
-                    <a:bodyPr/>
-                    <a:lstStyle/>
-                    <a:p>
-                      <a:pPr indent="0" marL="0">
-                        <a:buNone/>
-                      </a:pPr>
-                      <a:r>
-                        <a:rPr lang="en-US" sz="1100" dirty="0">
-                          <a:solidFill>
-                            <a:srgbClr val="2E7D62"/>
-                          </a:solidFill>
-                          <a:latin typeface="Calibri" pitchFamily="34" charset="0"/>
-                          <a:ea typeface="Calibri" pitchFamily="34" charset="-122"/>
-                          <a:cs typeface="Calibri" pitchFamily="34" charset="-120"/>
-                        </a:rPr>
-                        <a:t>50.7%</a:t>
+                        <a:t>57.0%</a:t>
                       </a:r>
                       <a:endParaRPr lang="en-US" sz="1100" dirty="0">
                         <a:latin typeface="Calibri" charset="0"/>
@@ -13880,7 +13685,72 @@
                           <a:ea typeface="Calibri" pitchFamily="34" charset="-122"/>
                           <a:cs typeface="Calibri" pitchFamily="34" charset="-120"/>
                         </a:rPr>
-                        <a:t>38.8%</a:t>
+                        <a:t>58.4%</a:t>
+                      </a:r>
+                      <a:endParaRPr lang="en-US" sz="1100" dirty="0">
+                        <a:latin typeface="Calibri" charset="0"/>
+                        <a:ea typeface="Calibri" charset="0"/>
+                        <a:cs typeface="Calibri" charset="0"/>
+                      </a:endParaRPr>
+                    </a:p>
+                  </a:txBody>
+                  <a:tcPr marL="54864" marR="54864" marT="54864" marB="54864" anchor="ctr">
+                    <a:lnL w="6350" cap="flat" cmpd="sng" algn="ctr">
+                      <a:solidFill>
+                        <a:srgbClr val="D8DEE4"/>
+                      </a:solidFill>
+                      <a:prstDash val="solid"/>
+                      <a:round/>
+                      <a:headEnd type="none" w="med" len="med"/>
+                      <a:tailEnd type="none" w="med" len="med"/>
+                    </a:lnL>
+                    <a:lnR w="6350" cap="flat" cmpd="sng" algn="ctr">
+                      <a:solidFill>
+                        <a:srgbClr val="D8DEE4"/>
+                      </a:solidFill>
+                      <a:prstDash val="solid"/>
+                      <a:round/>
+                      <a:headEnd type="none" w="med" len="med"/>
+                      <a:tailEnd type="none" w="med" len="med"/>
+                    </a:lnR>
+                    <a:lnT w="6350" cap="flat" cmpd="sng" algn="ctr">
+                      <a:solidFill>
+                        <a:srgbClr val="D8DEE4"/>
+                      </a:solidFill>
+                      <a:prstDash val="solid"/>
+                      <a:round/>
+                      <a:headEnd type="none" w="med" len="med"/>
+                      <a:tailEnd type="none" w="med" len="med"/>
+                    </a:lnT>
+                    <a:lnB w="6350" cap="flat" cmpd="sng" algn="ctr">
+                      <a:solidFill>
+                        <a:srgbClr val="D8DEE4"/>
+                      </a:solidFill>
+                      <a:prstDash val="solid"/>
+                      <a:round/>
+                      <a:headEnd type="none" w="med" len="med"/>
+                      <a:tailEnd type="none" w="med" len="med"/>
+                    </a:lnB>
+                  </a:tcPr>
+                </a:tc>
+                <a:tc>
+                  <a:txBody>
+                    <a:bodyPr/>
+                    <a:lstStyle/>
+                    <a:p>
+                      <a:pPr indent="0" marL="0">
+                        <a:buNone/>
+                      </a:pPr>
+                      <a:r>
+                        <a:rPr lang="en-US" sz="1100" dirty="0">
+                          <a:solidFill>
+                            <a:srgbClr val="17232F"/>
+                          </a:solidFill>
+                          <a:latin typeface="Calibri" pitchFamily="34" charset="0"/>
+                          <a:ea typeface="Calibri" pitchFamily="34" charset="-122"/>
+                          <a:cs typeface="Calibri" pitchFamily="34" charset="-120"/>
+                        </a:rPr>
+                        <a:t>40.4%</a:t>
                       </a:r>
                       <a:endParaRPr lang="en-US" sz="1100" dirty="0">
                         <a:latin typeface="Calibri" charset="0"/>
@@ -13945,7 +13815,334 @@
                           <a:ea typeface="Calibri" pitchFamily="34" charset="-122"/>
                           <a:cs typeface="Calibri" pitchFamily="34" charset="-120"/>
                         </a:rPr>
-                        <a:t>66.3%</a:t>
+                        <a:t>65.2%</a:t>
+                      </a:r>
+                      <a:endParaRPr lang="en-US" sz="1100" dirty="0">
+                        <a:latin typeface="Calibri" charset="0"/>
+                        <a:ea typeface="Calibri" charset="0"/>
+                        <a:cs typeface="Calibri" charset="0"/>
+                      </a:endParaRPr>
+                    </a:p>
+                  </a:txBody>
+                  <a:tcPr marL="54864" marR="54864" marT="54864" marB="54864" anchor="ctr">
+                    <a:lnL w="6350" cap="flat" cmpd="sng" algn="ctr">
+                      <a:solidFill>
+                        <a:srgbClr val="D8DEE4"/>
+                      </a:solidFill>
+                      <a:prstDash val="solid"/>
+                      <a:round/>
+                      <a:headEnd type="none" w="med" len="med"/>
+                      <a:tailEnd type="none" w="med" len="med"/>
+                    </a:lnL>
+                    <a:lnR w="6350" cap="flat" cmpd="sng" algn="ctr">
+                      <a:solidFill>
+                        <a:srgbClr val="D8DEE4"/>
+                      </a:solidFill>
+                      <a:prstDash val="solid"/>
+                      <a:round/>
+                      <a:headEnd type="none" w="med" len="med"/>
+                      <a:tailEnd type="none" w="med" len="med"/>
+                    </a:lnR>
+                    <a:lnT w="6350" cap="flat" cmpd="sng" algn="ctr">
+                      <a:solidFill>
+                        <a:srgbClr val="D8DEE4"/>
+                      </a:solidFill>
+                      <a:prstDash val="solid"/>
+                      <a:round/>
+                      <a:headEnd type="none" w="med" len="med"/>
+                      <a:tailEnd type="none" w="med" len="med"/>
+                    </a:lnT>
+                    <a:lnB w="6350" cap="flat" cmpd="sng" algn="ctr">
+                      <a:solidFill>
+                        <a:srgbClr val="D8DEE4"/>
+                      </a:solidFill>
+                      <a:prstDash val="solid"/>
+                      <a:round/>
+                      <a:headEnd type="none" w="med" len="med"/>
+                      <a:tailEnd type="none" w="med" len="med"/>
+                    </a:lnB>
+                  </a:tcPr>
+                </a:tc>
+              </a:tr>
+              <a:tr h="384048">
+                <a:tc>
+                  <a:txBody>
+                    <a:bodyPr/>
+                    <a:lstStyle/>
+                    <a:p>
+                      <a:pPr indent="0" marL="0">
+                        <a:buNone/>
+                      </a:pPr>
+                      <a:r>
+                        <a:rPr lang="en-US" sz="1100" dirty="0">
+                          <a:solidFill>
+                            <a:srgbClr val="17232F"/>
+                          </a:solidFill>
+                          <a:latin typeface="Calibri" pitchFamily="34" charset="0"/>
+                          <a:ea typeface="Calibri" pitchFamily="34" charset="-122"/>
+                          <a:cs typeface="Calibri" pitchFamily="34" charset="-120"/>
+                        </a:rPr>
+                        <a:t>Precision, median</a:t>
+                      </a:r>
+                      <a:endParaRPr lang="en-US" sz="1100" dirty="0">
+                        <a:latin typeface="Calibri" charset="0"/>
+                        <a:ea typeface="Calibri" charset="0"/>
+                        <a:cs typeface="Calibri" charset="0"/>
+                      </a:endParaRPr>
+                    </a:p>
+                  </a:txBody>
+                  <a:tcPr marL="54864" marR="54864" marT="54864" marB="54864" anchor="ctr">
+                    <a:lnL w="6350" cap="flat" cmpd="sng" algn="ctr">
+                      <a:solidFill>
+                        <a:srgbClr val="D8DEE4"/>
+                      </a:solidFill>
+                      <a:prstDash val="solid"/>
+                      <a:round/>
+                      <a:headEnd type="none" w="med" len="med"/>
+                      <a:tailEnd type="none" w="med" len="med"/>
+                    </a:lnL>
+                    <a:lnR w="6350" cap="flat" cmpd="sng" algn="ctr">
+                      <a:solidFill>
+                        <a:srgbClr val="D8DEE4"/>
+                      </a:solidFill>
+                      <a:prstDash val="solid"/>
+                      <a:round/>
+                      <a:headEnd type="none" w="med" len="med"/>
+                      <a:tailEnd type="none" w="med" len="med"/>
+                    </a:lnR>
+                    <a:lnT w="6350" cap="flat" cmpd="sng" algn="ctr">
+                      <a:solidFill>
+                        <a:srgbClr val="D8DEE4"/>
+                      </a:solidFill>
+                      <a:prstDash val="solid"/>
+                      <a:round/>
+                      <a:headEnd type="none" w="med" len="med"/>
+                      <a:tailEnd type="none" w="med" len="med"/>
+                    </a:lnT>
+                    <a:lnB w="6350" cap="flat" cmpd="sng" algn="ctr">
+                      <a:solidFill>
+                        <a:srgbClr val="D8DEE4"/>
+                      </a:solidFill>
+                      <a:prstDash val="solid"/>
+                      <a:round/>
+                      <a:headEnd type="none" w="med" len="med"/>
+                      <a:tailEnd type="none" w="med" len="med"/>
+                    </a:lnB>
+                  </a:tcPr>
+                </a:tc>
+                <a:tc>
+                  <a:txBody>
+                    <a:bodyPr/>
+                    <a:lstStyle/>
+                    <a:p>
+                      <a:pPr indent="0" marL="0">
+                        <a:buNone/>
+                      </a:pPr>
+                      <a:r>
+                        <a:rPr lang="en-US" sz="1100" dirty="0">
+                          <a:solidFill>
+                            <a:srgbClr val="17232F"/>
+                          </a:solidFill>
+                          <a:latin typeface="Calibri" pitchFamily="34" charset="0"/>
+                          <a:ea typeface="Calibri" pitchFamily="34" charset="-122"/>
+                          <a:cs typeface="Calibri" pitchFamily="34" charset="-120"/>
+                        </a:rPr>
+                        <a:t>62.5%</a:t>
+                      </a:r>
+                      <a:endParaRPr lang="en-US" sz="1100" dirty="0">
+                        <a:latin typeface="Calibri" charset="0"/>
+                        <a:ea typeface="Calibri" charset="0"/>
+                        <a:cs typeface="Calibri" charset="0"/>
+                      </a:endParaRPr>
+                    </a:p>
+                  </a:txBody>
+                  <a:tcPr marL="54864" marR="54864" marT="54864" marB="54864" anchor="ctr">
+                    <a:lnL w="6350" cap="flat" cmpd="sng" algn="ctr">
+                      <a:solidFill>
+                        <a:srgbClr val="D8DEE4"/>
+                      </a:solidFill>
+                      <a:prstDash val="solid"/>
+                      <a:round/>
+                      <a:headEnd type="none" w="med" len="med"/>
+                      <a:tailEnd type="none" w="med" len="med"/>
+                    </a:lnL>
+                    <a:lnR w="6350" cap="flat" cmpd="sng" algn="ctr">
+                      <a:solidFill>
+                        <a:srgbClr val="D8DEE4"/>
+                      </a:solidFill>
+                      <a:prstDash val="solid"/>
+                      <a:round/>
+                      <a:headEnd type="none" w="med" len="med"/>
+                      <a:tailEnd type="none" w="med" len="med"/>
+                    </a:lnR>
+                    <a:lnT w="6350" cap="flat" cmpd="sng" algn="ctr">
+                      <a:solidFill>
+                        <a:srgbClr val="D8DEE4"/>
+                      </a:solidFill>
+                      <a:prstDash val="solid"/>
+                      <a:round/>
+                      <a:headEnd type="none" w="med" len="med"/>
+                      <a:tailEnd type="none" w="med" len="med"/>
+                    </a:lnT>
+                    <a:lnB w="6350" cap="flat" cmpd="sng" algn="ctr">
+                      <a:solidFill>
+                        <a:srgbClr val="D8DEE4"/>
+                      </a:solidFill>
+                      <a:prstDash val="solid"/>
+                      <a:round/>
+                      <a:headEnd type="none" w="med" len="med"/>
+                      <a:tailEnd type="none" w="med" len="med"/>
+                    </a:lnB>
+                  </a:tcPr>
+                </a:tc>
+                <a:tc>
+                  <a:txBody>
+                    <a:bodyPr/>
+                    <a:lstStyle/>
+                    <a:p>
+                      <a:pPr indent="0" marL="0">
+                        <a:buNone/>
+                      </a:pPr>
+                      <a:r>
+                        <a:rPr lang="en-US" sz="1100" dirty="0">
+                          <a:solidFill>
+                            <a:srgbClr val="17232F"/>
+                          </a:solidFill>
+                          <a:latin typeface="Calibri" pitchFamily="34" charset="0"/>
+                          <a:ea typeface="Calibri" pitchFamily="34" charset="-122"/>
+                          <a:cs typeface="Calibri" pitchFamily="34" charset="-120"/>
+                        </a:rPr>
+                        <a:t>55.2%</a:t>
+                      </a:r>
+                      <a:endParaRPr lang="en-US" sz="1100" dirty="0">
+                        <a:latin typeface="Calibri" charset="0"/>
+                        <a:ea typeface="Calibri" charset="0"/>
+                        <a:cs typeface="Calibri" charset="0"/>
+                      </a:endParaRPr>
+                    </a:p>
+                  </a:txBody>
+                  <a:tcPr marL="54864" marR="54864" marT="54864" marB="54864" anchor="ctr">
+                    <a:lnL w="6350" cap="flat" cmpd="sng" algn="ctr">
+                      <a:solidFill>
+                        <a:srgbClr val="D8DEE4"/>
+                      </a:solidFill>
+                      <a:prstDash val="solid"/>
+                      <a:round/>
+                      <a:headEnd type="none" w="med" len="med"/>
+                      <a:tailEnd type="none" w="med" len="med"/>
+                    </a:lnL>
+                    <a:lnR w="6350" cap="flat" cmpd="sng" algn="ctr">
+                      <a:solidFill>
+                        <a:srgbClr val="D8DEE4"/>
+                      </a:solidFill>
+                      <a:prstDash val="solid"/>
+                      <a:round/>
+                      <a:headEnd type="none" w="med" len="med"/>
+                      <a:tailEnd type="none" w="med" len="med"/>
+                    </a:lnR>
+                    <a:lnT w="6350" cap="flat" cmpd="sng" algn="ctr">
+                      <a:solidFill>
+                        <a:srgbClr val="D8DEE4"/>
+                      </a:solidFill>
+                      <a:prstDash val="solid"/>
+                      <a:round/>
+                      <a:headEnd type="none" w="med" len="med"/>
+                      <a:tailEnd type="none" w="med" len="med"/>
+                    </a:lnT>
+                    <a:lnB w="6350" cap="flat" cmpd="sng" algn="ctr">
+                      <a:solidFill>
+                        <a:srgbClr val="D8DEE4"/>
+                      </a:solidFill>
+                      <a:prstDash val="solid"/>
+                      <a:round/>
+                      <a:headEnd type="none" w="med" len="med"/>
+                      <a:tailEnd type="none" w="med" len="med"/>
+                    </a:lnB>
+                  </a:tcPr>
+                </a:tc>
+                <a:tc>
+                  <a:txBody>
+                    <a:bodyPr/>
+                    <a:lstStyle/>
+                    <a:p>
+                      <a:pPr indent="0" marL="0">
+                        <a:buNone/>
+                      </a:pPr>
+                      <a:r>
+                        <a:rPr lang="en-US" sz="1100" dirty="0">
+                          <a:solidFill>
+                            <a:srgbClr val="17232F"/>
+                          </a:solidFill>
+                          <a:latin typeface="Calibri" pitchFamily="34" charset="0"/>
+                          <a:ea typeface="Calibri" pitchFamily="34" charset="-122"/>
+                          <a:cs typeface="Calibri" pitchFamily="34" charset="-120"/>
+                        </a:rPr>
+                        <a:t>25.0%</a:t>
+                      </a:r>
+                      <a:endParaRPr lang="en-US" sz="1100" dirty="0">
+                        <a:latin typeface="Calibri" charset="0"/>
+                        <a:ea typeface="Calibri" charset="0"/>
+                        <a:cs typeface="Calibri" charset="0"/>
+                      </a:endParaRPr>
+                    </a:p>
+                  </a:txBody>
+                  <a:tcPr marL="54864" marR="54864" marT="54864" marB="54864" anchor="ctr">
+                    <a:lnL w="6350" cap="flat" cmpd="sng" algn="ctr">
+                      <a:solidFill>
+                        <a:srgbClr val="D8DEE4"/>
+                      </a:solidFill>
+                      <a:prstDash val="solid"/>
+                      <a:round/>
+                      <a:headEnd type="none" w="med" len="med"/>
+                      <a:tailEnd type="none" w="med" len="med"/>
+                    </a:lnL>
+                    <a:lnR w="6350" cap="flat" cmpd="sng" algn="ctr">
+                      <a:solidFill>
+                        <a:srgbClr val="D8DEE4"/>
+                      </a:solidFill>
+                      <a:prstDash val="solid"/>
+                      <a:round/>
+                      <a:headEnd type="none" w="med" len="med"/>
+                      <a:tailEnd type="none" w="med" len="med"/>
+                    </a:lnR>
+                    <a:lnT w="6350" cap="flat" cmpd="sng" algn="ctr">
+                      <a:solidFill>
+                        <a:srgbClr val="D8DEE4"/>
+                      </a:solidFill>
+                      <a:prstDash val="solid"/>
+                      <a:round/>
+                      <a:headEnd type="none" w="med" len="med"/>
+                      <a:tailEnd type="none" w="med" len="med"/>
+                    </a:lnT>
+                    <a:lnB w="6350" cap="flat" cmpd="sng" algn="ctr">
+                      <a:solidFill>
+                        <a:srgbClr val="D8DEE4"/>
+                      </a:solidFill>
+                      <a:prstDash val="solid"/>
+                      <a:round/>
+                      <a:headEnd type="none" w="med" len="med"/>
+                      <a:tailEnd type="none" w="med" len="med"/>
+                    </a:lnB>
+                  </a:tcPr>
+                </a:tc>
+                <a:tc>
+                  <a:txBody>
+                    <a:bodyPr/>
+                    <a:lstStyle/>
+                    <a:p>
+                      <a:pPr indent="0" marL="0">
+                        <a:buNone/>
+                      </a:pPr>
+                      <a:r>
+                        <a:rPr lang="en-US" sz="1100" dirty="0">
+                          <a:solidFill>
+                            <a:srgbClr val="17232F"/>
+                          </a:solidFill>
+                          <a:latin typeface="Calibri" pitchFamily="34" charset="0"/>
+                          <a:ea typeface="Calibri" pitchFamily="34" charset="-122"/>
+                          <a:cs typeface="Calibri" pitchFamily="34" charset="-120"/>
+                        </a:rPr>
+                        <a:t>9.8%</a:t>
                       </a:r>
                       <a:endParaRPr lang="en-US" sz="1100" dirty="0">
                         <a:latin typeface="Calibri" charset="0"/>
@@ -14058,7 +14255,7 @@
                 <a:ea typeface="Cambria" pitchFamily="34" charset="-122"/>
                 <a:cs typeface="Cambria" pitchFamily="34" charset="-120"/>
               </a:rPr>
-              <a:t>We predicted the wrong repository would benefit.</a:t>
+              <a:t>It helps where the suite is slow, and nowhere else.</a:t>
             </a:r>
             <a:endParaRPr lang="en-US" sz="1600" dirty="0"/>
           </a:p>
@@ -14100,7 +14297,7 @@
                 <a:ea typeface="Calibri" pitchFamily="34" charset="-122"/>
                 <a:cs typeface="Calibri" pitchFamily="34" charset="-120"/>
               </a:rPr>
-              <a:t>scrapy's import closures are far larger — median 42.9% of the suite against 9.4% for attrs — so we expected the CLOSURE_TOO_LARGE limit to fire more often and the graph to help less. It did fire more often, on 8 of 27 mutants, and the graph still helped about five times as much.</a:t>
+              <a:t>On scrapy, whose suite takes 52 seconds, the graph halves the fallback rate and lifts the saving from 40.4% to 65.2%. On attrs, whose suite takes 3.9 seconds, it is worth almost nothing: 58.4% against 57.0%, with the fallback rate barely moving.</a:t>
             </a:r>
             <a:endParaRPr lang="en-US" sz="1200" dirty="0"/>
           </a:p>
@@ -14129,7 +14326,7 @@
                 <a:ea typeface="Calibri" pitchFamily="34" charset="-122"/>
                 <a:cs typeface="Calibri" pitchFamily="34" charset="-120"/>
               </a:rPr>
-              <a:t>The prediction confused closure share with time saved. Selecting 43% of a 62-second suite saves half a minute; selecting 9% of a four-second suite saves almost nothing, because pytest's own startup is the floor. The property that predicts the benefit is absolute suite duration.</a:t>
+              <a:t>The property that predicts the benefit is absolute suite duration, not test count and not closure size. A four-second suite has nothing left to give once pytest's own startup is paid — which is the same floor that makes parallelism slower than serial on flask.</a:t>
             </a:r>
             <a:endParaRPr lang="en-US" sz="1200" dirty="0"/>
           </a:p>

--- a/docs/tia-review-2.pptx
+++ b/docs/tia-review-2.pptx
@@ -6960,6 +6960,30 @@
                 <a:ea typeface="Calibri" pitchFamily="34" charset="-122"/>
                 <a:cs typeface="Calibri" pitchFamily="34" charset="-120"/>
               </a:rPr>
+              <a:t>pip install tia-select — published, 0.1.0</a:t>
+            </a:r>
+            <a:endParaRPr lang="en-US" sz="1100" dirty="0"/>
+          </a:p>
+          <a:p>
+            <a:pPr marL="342900" indent="-342900">
+              <a:lnSpc>
+                <a:spcPts val="1600"/>
+              </a:lnSpc>
+              <a:spcAft>
+                <a:spcPts val="800"/>
+              </a:spcAft>
+              <a:buSzPct val="100000"/>
+              <a:buChar char="•"/>
+            </a:pPr>
+            <a:r>
+              <a:rPr lang="en-US" sz="1100" dirty="0">
+                <a:solidFill>
+                  <a:srgbClr val="17232F"/>
+                </a:solidFill>
+                <a:latin typeface="Calibri" pitchFamily="34" charset="0"/>
+                <a:ea typeface="Calibri" pitchFamily="34" charset="-122"/>
+                <a:cs typeface="Calibri" pitchFamily="34" charset="-120"/>
+              </a:rPr>
               <a:t>github.com/Tanmay-Singh-24/tia — public, CI green on 3.11 and 3.12</a:t>
             </a:r>
             <a:endParaRPr lang="en-US" sz="1100" dirty="0"/>
@@ -7094,30 +7118,6 @@
                 <a:cs typeface="Calibri" pitchFamily="34" charset="-120"/>
               </a:rPr>
               <a:t>Third corpus repository (black, held in reserve)</a:t>
-            </a:r>
-            <a:endParaRPr lang="en-US" sz="1100" dirty="0"/>
-          </a:p>
-          <a:p>
-            <a:pPr marL="342900" indent="-342900">
-              <a:lnSpc>
-                <a:spcPts val="1600"/>
-              </a:lnSpc>
-              <a:spcAft>
-                <a:spcPts val="800"/>
-              </a:spcAft>
-              <a:buSzPct val="100000"/>
-              <a:buChar char="•"/>
-            </a:pPr>
-            <a:r>
-              <a:rPr lang="en-US" sz="1100" dirty="0">
-                <a:solidFill>
-                  <a:srgbClr val="17232F"/>
-                </a:solidFill>
-                <a:latin typeface="Calibri" pitchFamily="34" charset="0"/>
-                <a:ea typeface="Calibri" pitchFamily="34" charset="-122"/>
-                <a:cs typeface="Calibri" pitchFamily="34" charset="-120"/>
-              </a:rPr>
-              <a:t>PyPI release as tia-select</a:t>
             </a:r>
             <a:endParaRPr lang="en-US" sz="1100" dirty="0"/>
           </a:p>

--- a/docs/tia-review-2.pptx
+++ b/docs/tia-review-2.pptx
@@ -11863,7 +11863,7 @@
                 <a:ea typeface="Cambria" pitchFamily="34" charset="-122"/>
                 <a:cs typeface="Cambria" pitchFamily="34" charset="-120"/>
               </a:rPr>
-              <a:t>9 of the 16 rules deliberately give up the speed benefit. That is the design, not a shortfall in it.</a:t>
+              <a:t>10 of the 18 possible outcomes deliberately give up the speed benefit. That is the design, not a shortfall in it.</a:t>
             </a:r>
             <a:endParaRPr lang="en-US" sz="1700" dirty="0"/>
           </a:p>

--- a/docs/tia-review-2.pptx
+++ b/docs/tia-review-2.pptx
@@ -6936,7 +6936,7 @@
                 <a:ea typeface="Calibri" pitchFamily="34" charset="-122"/>
                 <a:cs typeface="Calibri" pitchFamily="34" charset="-120"/>
               </a:rPr>
-              <a:t>make reproduce — regenerates the tables from the pinned corpus</a:t>
+              <a:t>make reproduce — replays every published defect and checks the result</a:t>
             </a:r>
             <a:endParaRPr lang="en-US" sz="1100" dirty="0"/>
           </a:p>
@@ -8185,7 +8185,7 @@
                           <a:ea typeface="Calibri" pitchFamily="34" charset="-122"/>
                           <a:cs typeface="Calibri" pitchFamily="34" charset="-120"/>
                         </a:rPr>
-                        <a:t>Baseline suite time</a:t>
+                        <a:t>Full suite, median</a:t>
                       </a:r>
                       <a:endParaRPr lang="en-US" sz="1100" dirty="0">
                         <a:latin typeface="Calibri" charset="0"/>
@@ -8250,7 +8250,7 @@
                           <a:ea typeface="Calibri" pitchFamily="34" charset="-122"/>
                           <a:cs typeface="Calibri" pitchFamily="34" charset="-120"/>
                         </a:rPr>
-                        <a:t>3.93 s</a:t>
+                        <a:t>3.8 s</a:t>
                       </a:r>
                       <a:endParaRPr lang="en-US" sz="1100" dirty="0">
                         <a:latin typeface="Calibri" charset="0"/>
@@ -8315,7 +8315,7 @@
                           <a:ea typeface="Calibri" pitchFamily="34" charset="-122"/>
                           <a:cs typeface="Calibri" pitchFamily="34" charset="-120"/>
                         </a:rPr>
-                        <a:t>62.6 s</a:t>
+                        <a:t>52 s</a:t>
                       </a:r>
                       <a:endParaRPr lang="en-US" sz="1100" dirty="0">
                         <a:latin typeface="Calibri" charset="0"/>

--- a/docs/tia-review-2.pptx
+++ b/docs/tia-review-2.pptx
@@ -1393,7 +1393,7 @@
           <a:p>
             <a:r>
               <a:rPr lang="en-US" dirty="0"/>
-              <a:t>A project whose contribution is reproducible measurement has to be hardest on its own measurements. Both faults are written up in DECISIONS with what now prevents them.</a:t>
+              <a:t>A project whose contribution is reproducible measurement has to be hardest on its own measurements. All three faults are written up in DECISIONS with what now prevents them.</a:t>
             </a:r>
             <a:endParaRPr lang="en-US" dirty="0"/>
           </a:p>
@@ -1965,7 +1965,7 @@
                 <a:ea typeface="Calibri" pitchFamily="34" charset="-122"/>
                 <a:cs typeface="Calibri" pitchFamily="34" charset="-120"/>
               </a:rPr>
-              <a:t>Zero missed defects across 211 injected into two real codebases, at up to 65.2% less test time.</a:t>
+              <a:t>Zero missed defects across 213 injected into two real codebases, saving up to 66.9% of test time per change.</a:t>
             </a:r>
             <a:endParaRPr lang="en-US" sz="1400" dirty="0"/>
           </a:p>
@@ -6224,7 +6224,7 @@
                 <a:ea typeface="Calibri" pitchFamily="34" charset="-122"/>
                 <a:cs typeface="Calibri" pitchFamily="34" charset="-120"/>
               </a:rPr>
-              <a:t>What we claim instead is bounded, measured safety: 0 misses in 211 non-equivalent injected defects, on two real codebases, reproducible from the pinned corpus with one command.</a:t>
+              <a:t>What we claim instead is bounded, measured safety: 0 misses in 213 non-equivalent injected defects, on two real codebases, reproducible from the pinned corpus with one command.</a:t>
             </a:r>
             <a:endParaRPr lang="en-US" sz="1300" dirty="0"/>
           </a:p>
@@ -7093,7 +7093,7 @@
                 <a:ea typeface="Calibri" pitchFamily="34" charset="-122"/>
                 <a:cs typeface="Calibri" pitchFamily="34" charset="-120"/>
               </a:rPr>
-              <a:t>Sweep the closure limit against net reduction</a:t>
+              <a:t>Sweep the closure limit against time saved per change</a:t>
             </a:r>
             <a:endParaRPr lang="en-US" sz="1100" dirty="0"/>
           </a:p>
@@ -7207,7 +7207,7 @@
                 <a:ea typeface="Cambria" pitchFamily="34" charset="-122"/>
                 <a:cs typeface="Cambria" pitchFamily="34" charset="-120"/>
               </a:rPr>
-              <a:t>0 misses in 211 injected defects. 65.2% less test time on a 4,371-test suite. Four bugs found by our own evaluation — including one the import graph itself introduced.</a:t>
+              <a:t>0 misses in 213 injected defects. 66.9% of test time saved per change on a 4,371-test suite. Four bugs found by our own evaluation — including one the import graph itself introduced.</a:t>
             </a:r>
             <a:endParaRPr lang="en-US" sz="1500" dirty="0"/>
           </a:p>
@@ -7376,7 +7376,7 @@
                 <a:ea typeface="Cambria" pitchFamily="34" charset="-122"/>
                 <a:cs typeface="Cambria" pitchFamily="34" charset="-120"/>
               </a:rPr>
-              <a:t>0 / 211</a:t>
+              <a:t>0 / 213</a:t>
             </a:r>
             <a:endParaRPr lang="en-US" sz="3400" dirty="0"/>
           </a:p>
@@ -7520,7 +7520,7 @@
                 <a:ea typeface="Cambria" pitchFamily="34" charset="-122"/>
                 <a:cs typeface="Cambria" pitchFamily="34" charset="-120"/>
               </a:rPr>
-              <a:t>65.2%</a:t>
+              <a:t>66.9%</a:t>
             </a:r>
             <a:endParaRPr lang="en-US" sz="3400" dirty="0"/>
           </a:p>
@@ -7559,7 +7559,7 @@
                 <a:ea typeface="Calibri" pitchFamily="34" charset="-122"/>
                 <a:cs typeface="Calibri" pitchFamily="34" charset="-120"/>
               </a:rPr>
-              <a:t>less test time on scrapy</a:t>
+              <a:t>test time saved per change</a:t>
             </a:r>
             <a:endParaRPr lang="en-US" sz="1200" dirty="0"/>
           </a:p>
@@ -7598,7 +7598,7 @@
                 <a:ea typeface="Calibri" pitchFamily="34" charset="-122"/>
                 <a:cs typeface="Calibri" pitchFamily="34" charset="-120"/>
               </a:rPr>
-              <a:t>58.4% on attrs</a:t>
+              <a:t>scrapy; 42.7% on attrs</a:t>
             </a:r>
             <a:endParaRPr lang="en-US" sz="1000" dirty="0"/>
           </a:p>
@@ -7664,7 +7664,7 @@
                 <a:ea typeface="Cambria" pitchFamily="34" charset="-122"/>
                 <a:cs typeface="Cambria" pitchFamily="34" charset="-120"/>
               </a:rPr>
-              <a:t>29.6%</a:t>
+              <a:t>28.6%</a:t>
             </a:r>
             <a:endParaRPr lang="en-US" sz="3400" dirty="0"/>
           </a:p>
@@ -7742,7 +7742,7 @@
                 <a:ea typeface="Calibri" pitchFamily="34" charset="-122"/>
                 <a:cs typeface="Calibri" pitchFamily="34" charset="-120"/>
               </a:rPr>
-              <a:t>50.5% on attrs — the honest cost</a:t>
+              <a:t>50.3% on attrs — the honest cost</a:t>
             </a:r>
             <a:endParaRPr lang="en-US" sz="1000" dirty="0"/>
           </a:p>
@@ -8250,7 +8250,7 @@
                           <a:ea typeface="Calibri" pitchFamily="34" charset="-122"/>
                           <a:cs typeface="Calibri" pitchFamily="34" charset="-120"/>
                         </a:rPr>
-                        <a:t>3.8 s</a:t>
+                        <a:t>3.9 s</a:t>
                       </a:r>
                       <a:endParaRPr lang="en-US" sz="1100" dirty="0">
                         <a:latin typeface="Calibri" charset="0"/>
@@ -8315,7 +8315,7 @@
                           <a:ea typeface="Calibri" pitchFamily="34" charset="-122"/>
                           <a:cs typeface="Calibri" pitchFamily="34" charset="-120"/>
                         </a:rPr>
-                        <a:t>52 s</a:t>
+                        <a:t>53.5 s</a:t>
                       </a:r>
                       <a:endParaRPr lang="en-US" sz="1100" dirty="0">
                         <a:latin typeface="Calibri" charset="0"/>
@@ -8447,7 +8447,7 @@
                           <a:ea typeface="Calibri" pitchFamily="34" charset="-122"/>
                           <a:cs typeface="Calibri" pitchFamily="34" charset="-120"/>
                         </a:rPr>
-                        <a:t>184</a:t>
+                        <a:t>185</a:t>
                       </a:r>
                       <a:endParaRPr lang="en-US" sz="1100" dirty="0">
                         <a:latin typeface="Calibri" charset="0"/>
@@ -8512,7 +8512,7 @@
                           <a:ea typeface="Calibri" pitchFamily="34" charset="-122"/>
                           <a:cs typeface="Calibri" pitchFamily="34" charset="-120"/>
                         </a:rPr>
-                        <a:t>27</a:t>
+                        <a:t>28</a:t>
                       </a:r>
                       <a:endParaRPr lang="en-US" sz="1100" dirty="0">
                         <a:latin typeface="Calibri" charset="0"/>
@@ -8841,7 +8841,7 @@
                           <a:ea typeface="Calibri" pitchFamily="34" charset="-122"/>
                           <a:cs typeface="Calibri" pitchFamily="34" charset="-120"/>
                         </a:rPr>
-                        <a:t>50.5%</a:t>
+                        <a:t>50.3%</a:t>
                       </a:r>
                       <a:endParaRPr lang="en-US" sz="1100" dirty="0">
                         <a:latin typeface="Calibri" charset="0"/>
@@ -8906,7 +8906,7 @@
                           <a:ea typeface="Calibri" pitchFamily="34" charset="-122"/>
                           <a:cs typeface="Calibri" pitchFamily="34" charset="-120"/>
                         </a:rPr>
-                        <a:t>29.6%</a:t>
+                        <a:t>28.6%</a:t>
                       </a:r>
                       <a:endParaRPr lang="en-US" sz="1100" dirty="0">
                         <a:latin typeface="Calibri" charset="0"/>
@@ -8973,7 +8973,7 @@
                           <a:ea typeface="Calibri" pitchFamily="34" charset="-122"/>
                           <a:cs typeface="Calibri" pitchFamily="34" charset="-120"/>
                         </a:rPr>
-                        <a:t>Net time reduction</a:t>
+                        <a:t>Time saved per change</a:t>
                       </a:r>
                       <a:endParaRPr lang="en-US" sz="1100" dirty="0">
                         <a:latin typeface="Calibri" charset="0"/>
@@ -9038,7 +9038,7 @@
                           <a:ea typeface="Calibri" pitchFamily="34" charset="-122"/>
                           <a:cs typeface="Calibri" pitchFamily="34" charset="-120"/>
                         </a:rPr>
-                        <a:t>58.4%</a:t>
+                        <a:t>42.7%</a:t>
                       </a:r>
                       <a:endParaRPr lang="en-US" sz="1100" dirty="0">
                         <a:latin typeface="Calibri" charset="0"/>
@@ -9103,7 +9103,7 @@
                           <a:ea typeface="Calibri" pitchFamily="34" charset="-122"/>
                           <a:cs typeface="Calibri" pitchFamily="34" charset="-120"/>
                         </a:rPr>
-                        <a:t>65.2%</a:t>
+                        <a:t>66.9%</a:t>
                       </a:r>
                       <a:endParaRPr lang="en-US" sz="1100" dirty="0">
                         <a:latin typeface="Calibri" charset="0"/>
@@ -9235,7 +9235,7 @@
                           <a:ea typeface="Calibri" pitchFamily="34" charset="-122"/>
                           <a:cs typeface="Calibri" pitchFamily="34" charset="-120"/>
                         </a:rPr>
-                        <a:t>55.2%</a:t>
+                        <a:t>50.0%</a:t>
                       </a:r>
                       <a:endParaRPr lang="en-US" sz="1100" dirty="0">
                         <a:latin typeface="Calibri" charset="0"/>
@@ -9300,7 +9300,7 @@
                           <a:ea typeface="Calibri" pitchFamily="34" charset="-122"/>
                           <a:cs typeface="Calibri" pitchFamily="34" charset="-120"/>
                         </a:rPr>
-                        <a:t>9.8%</a:t>
+                        <a:t>11.2%</a:t>
                       </a:r>
                       <a:endParaRPr lang="en-US" sz="1100" dirty="0">
                         <a:latin typeface="Calibri" charset="0"/>
@@ -12966,7 +12966,7 @@
                           <a:ea typeface="Calibri" pitchFamily="34" charset="-122"/>
                           <a:cs typeface="Calibri" pitchFamily="34" charset="-120"/>
                         </a:rPr>
-                        <a:t>0 / 184</a:t>
+                        <a:t>0 / 185</a:t>
                       </a:r>
                       <a:endParaRPr lang="en-US" sz="1100" dirty="0">
                         <a:latin typeface="Calibri" charset="0"/>
@@ -13031,7 +13031,7 @@
                           <a:ea typeface="Calibri" pitchFamily="34" charset="-122"/>
                           <a:cs typeface="Calibri" pitchFamily="34" charset="-120"/>
                         </a:rPr>
-                        <a:t>0 / 184</a:t>
+                        <a:t>0 / 185</a:t>
                       </a:r>
                       <a:endParaRPr lang="en-US" sz="1100" dirty="0">
                         <a:latin typeface="Calibri" charset="0"/>
@@ -13096,7 +13096,7 @@
                           <a:ea typeface="Calibri" pitchFamily="34" charset="-122"/>
                           <a:cs typeface="Calibri" pitchFamily="34" charset="-120"/>
                         </a:rPr>
-                        <a:t>0 / 27</a:t>
+                        <a:t>0 / 28</a:t>
                       </a:r>
                       <a:endParaRPr lang="en-US" sz="1100" dirty="0">
                         <a:latin typeface="Calibri" charset="0"/>
@@ -13161,7 +13161,7 @@
                           <a:ea typeface="Calibri" pitchFamily="34" charset="-122"/>
                           <a:cs typeface="Calibri" pitchFamily="34" charset="-120"/>
                         </a:rPr>
-                        <a:t>0 / 27</a:t>
+                        <a:t>0 / 28</a:t>
                       </a:r>
                       <a:endParaRPr lang="en-US" sz="1100" dirty="0">
                         <a:latin typeface="Calibri" charset="0"/>
@@ -13293,7 +13293,7 @@
                           <a:ea typeface="Calibri" pitchFamily="34" charset="-122"/>
                           <a:cs typeface="Calibri" pitchFamily="34" charset="-120"/>
                         </a:rPr>
-                        <a:t>52.7%</a:t>
+                        <a:t>52.4%</a:t>
                       </a:r>
                       <a:endParaRPr lang="en-US" sz="1100" dirty="0">
                         <a:latin typeface="Calibri" charset="0"/>
@@ -13358,7 +13358,7 @@
                           <a:ea typeface="Calibri" pitchFamily="34" charset="-122"/>
                           <a:cs typeface="Calibri" pitchFamily="34" charset="-120"/>
                         </a:rPr>
-                        <a:t>50.5%</a:t>
+                        <a:t>50.3%</a:t>
                       </a:r>
                       <a:endParaRPr lang="en-US" sz="1100" dirty="0">
                         <a:latin typeface="Calibri" charset="0"/>
@@ -13423,7 +13423,7 @@
                           <a:ea typeface="Calibri" pitchFamily="34" charset="-122"/>
                           <a:cs typeface="Calibri" pitchFamily="34" charset="-120"/>
                         </a:rPr>
-                        <a:t>59.3%</a:t>
+                        <a:t>57.1%</a:t>
                       </a:r>
                       <a:endParaRPr lang="en-US" sz="1100" dirty="0">
                         <a:latin typeface="Calibri" charset="0"/>
@@ -13488,7 +13488,7 @@
                           <a:ea typeface="Calibri" pitchFamily="34" charset="-122"/>
                           <a:cs typeface="Calibri" pitchFamily="34" charset="-120"/>
                         </a:rPr>
-                        <a:t>29.6%</a:t>
+                        <a:t>28.6%</a:t>
                       </a:r>
                       <a:endParaRPr lang="en-US" sz="1100" dirty="0">
                         <a:latin typeface="Calibri" charset="0"/>
@@ -13555,7 +13555,7 @@
                           <a:ea typeface="Calibri" pitchFamily="34" charset="-122"/>
                           <a:cs typeface="Calibri" pitchFamily="34" charset="-120"/>
                         </a:rPr>
-                        <a:t>Net time reduction</a:t>
+                        <a:t>Time saved per change</a:t>
                       </a:r>
                       <a:endParaRPr lang="en-US" sz="1100" dirty="0">
                         <a:latin typeface="Calibri" charset="0"/>
@@ -13620,7 +13620,7 @@
                           <a:ea typeface="Calibri" pitchFamily="34" charset="-122"/>
                           <a:cs typeface="Calibri" pitchFamily="34" charset="-120"/>
                         </a:rPr>
-                        <a:t>57.0%</a:t>
+                        <a:t>41.9%</a:t>
                       </a:r>
                       <a:endParaRPr lang="en-US" sz="1100" dirty="0">
                         <a:latin typeface="Calibri" charset="0"/>
@@ -13685,7 +13685,7 @@
                           <a:ea typeface="Calibri" pitchFamily="34" charset="-122"/>
                           <a:cs typeface="Calibri" pitchFamily="34" charset="-120"/>
                         </a:rPr>
-                        <a:t>58.4%</a:t>
+                        <a:t>42.7%</a:t>
                       </a:r>
                       <a:endParaRPr lang="en-US" sz="1100" dirty="0">
                         <a:latin typeface="Calibri" charset="0"/>
@@ -13750,7 +13750,7 @@
                           <a:ea typeface="Calibri" pitchFamily="34" charset="-122"/>
                           <a:cs typeface="Calibri" pitchFamily="34" charset="-120"/>
                         </a:rPr>
-                        <a:t>40.4%</a:t>
+                        <a:t>44.2%</a:t>
                       </a:r>
                       <a:endParaRPr lang="en-US" sz="1100" dirty="0">
                         <a:latin typeface="Calibri" charset="0"/>
@@ -13815,7 +13815,7 @@
                           <a:ea typeface="Calibri" pitchFamily="34" charset="-122"/>
                           <a:cs typeface="Calibri" pitchFamily="34" charset="-120"/>
                         </a:rPr>
-                        <a:t>65.2%</a:t>
+                        <a:t>66.9%</a:t>
                       </a:r>
                       <a:endParaRPr lang="en-US" sz="1100" dirty="0">
                         <a:latin typeface="Calibri" charset="0"/>
@@ -13947,7 +13947,7 @@
                           <a:ea typeface="Calibri" pitchFamily="34" charset="-122"/>
                           <a:cs typeface="Calibri" pitchFamily="34" charset="-120"/>
                         </a:rPr>
-                        <a:t>62.5%</a:t>
+                        <a:t>50.0%</a:t>
                       </a:r>
                       <a:endParaRPr lang="en-US" sz="1100" dirty="0">
                         <a:latin typeface="Calibri" charset="0"/>
@@ -14012,7 +14012,7 @@
                           <a:ea typeface="Calibri" pitchFamily="34" charset="-122"/>
                           <a:cs typeface="Calibri" pitchFamily="34" charset="-120"/>
                         </a:rPr>
-                        <a:t>55.2%</a:t>
+                        <a:t>50.0%</a:t>
                       </a:r>
                       <a:endParaRPr lang="en-US" sz="1100" dirty="0">
                         <a:latin typeface="Calibri" charset="0"/>
@@ -14077,7 +14077,7 @@
                           <a:ea typeface="Calibri" pitchFamily="34" charset="-122"/>
                           <a:cs typeface="Calibri" pitchFamily="34" charset="-120"/>
                         </a:rPr>
-                        <a:t>25.0%</a:t>
+                        <a:t>31.2%</a:t>
                       </a:r>
                       <a:endParaRPr lang="en-US" sz="1100" dirty="0">
                         <a:latin typeface="Calibri" charset="0"/>
@@ -14142,7 +14142,7 @@
                           <a:ea typeface="Calibri" pitchFamily="34" charset="-122"/>
                           <a:cs typeface="Calibri" pitchFamily="34" charset="-120"/>
                         </a:rPr>
-                        <a:t>9.8%</a:t>
+                        <a:t>11.2%</a:t>
                       </a:r>
                       <a:endParaRPr lang="en-US" sz="1100" dirty="0">
                         <a:latin typeface="Calibri" charset="0"/>
@@ -14297,7 +14297,7 @@
                 <a:ea typeface="Calibri" pitchFamily="34" charset="-122"/>
                 <a:cs typeface="Calibri" pitchFamily="34" charset="-120"/>
               </a:rPr>
-              <a:t>On scrapy, whose suite takes 52 seconds, the graph halves the fallback rate and lifts the saving from 40.4% to 65.2%. On attrs, whose suite takes 3.9 seconds, it is worth almost nothing: 58.4% against 57.0%, with the fallback rate barely moving.</a:t>
+              <a:t>On scrapy, whose suite takes 53 seconds, the graph halves the fallback rate and lifts the saving from 44.2% to 66.9%. On attrs, whose suite takes 3.9 seconds, it is worth almost nothing: 42.7% against 41.9%, with the fallback rate barely moving.</a:t>
             </a:r>
             <a:endParaRPr lang="en-US" sz="1200" dirty="0"/>
           </a:p>
@@ -14429,7 +14429,7 @@
                 <a:ea typeface="Cambria" pitchFamily="34" charset="-122"/>
                 <a:cs typeface="Cambria" pitchFamily="34" charset="-120"/>
               </a:rPr>
-              <a:t>Two ways our own measurements lied</a:t>
+              <a:t>Three ways our own measurements lied</a:t>
             </a:r>
             <a:endParaRPr lang="en-US" sz="3400" dirty="0"/>
           </a:p>
@@ -14957,9 +14957,48 @@
                 <a:ea typeface="Calibri" pitchFamily="34" charset="-122"/>
                 <a:cs typeface="Calibri" pitchFamily="34" charset="-120"/>
               </a:rPr>
-              <a:t>net_reduction is computed inside the harness and excludes runs by exit code — a timeout measures a hang, not a suite. Recomputed, the published figure stands.</a:t>
+              <a:t>net_reduction is computed inside the harness and excludes runs by exit code — a timeout measures a hang, not a suite. That was not yet enough: see below.</a:t>
             </a:r>
             <a:endParaRPr lang="en-US" sz="1100" dirty="0"/>
+          </a:p>
+        </p:txBody>
+      </p:sp>
+      <p:sp>
+        <p:nvSpPr>
+          <p:cNvPr id="18" name="Text 16"/>
+          <p:cNvSpPr txBox="1"/>
+          <p:nvPr/>
+        </p:nvSpPr>
+        <p:spPr>
+          <a:xfrm>
+            <a:off x="640080" y="5897880"/>
+            <a:ext cx="10881360" cy="548640"/>
+          </a:xfrm>
+          <a:prstGeom prst="rect">
+            <a:avLst/>
+          </a:prstGeom>
+          <a:noFill/>
+          <a:ln/>
+        </p:spPr>
+        <p:txBody>
+          <a:bodyPr wrap="square" lIns="0" tIns="0" rIns="0" bIns="0" rtlCol="0" anchor="ctr"/>
+          <a:lstStyle/>
+          <a:p>
+            <a:pPr indent="0" marL="0">
+              <a:buNone/>
+            </a:pPr>
+            <a:r>
+              <a:rPr lang="en-US" sz="1200" b="1" dirty="0">
+                <a:solidFill>
+                  <a:srgbClr val="D1453B"/>
+                </a:solidFill>
+                <a:latin typeface="Calibri" pitchFamily="34" charset="0"/>
+                <a:ea typeface="Calibri" pitchFamily="34" charset="-122"/>
+                <a:cs typeface="Calibri" pitchFamily="34" charset="-120"/>
+              </a:rPr>
+              <a:t>A third, found re-measuring for 0.2.0: one mutant that hung the suite for 291 s set the published attrs saving at 58.4%. Measured per change, it is 42.7% (D-0020).</a:t>
+            </a:r>
+            <a:endParaRPr lang="en-US" sz="1200" dirty="0"/>
           </a:p>
         </p:txBody>
       </p:sp>
